--- a/courseware/ITIL 4 Foundation Training-v1.0.pptx
+++ b/courseware/ITIL 4 Foundation Training-v1.0.pptx
@@ -47675,7 +47675,7 @@
                 </a:solidFill>
                 <a:latin typeface="Arial"/>
               </a:rPr>
-              <a:t>Your course fee includes an official ITIL 4 Foundation exam voucher — book your exam while the material is fresh.</a:t>
+              <a:t>An official ITIL 4 Foundation exam voucher is included with this course — book your exam while the material is fresh.</a:t>
             </a:r>
           </a:p>
         </p:txBody>
